--- a/presentations/QA_Internship_Week1_Summary.pptx
+++ b/presentations/QA_Internship_Week1_Summary.pptx
@@ -1865,7 +1865,7 @@
                 <a:ea typeface="Calibri" pitchFamily="34" charset="-122"/>
                 <a:cs typeface="Calibri" pitchFamily="34" charset="-120"/>
               </a:rPr>
-              <a:t>Testing vs. QA</a:t>
+              <a:t>Testing vs. QA vs QC</a:t>
             </a:r>
             <a:endParaRPr lang="en-US" sz="1400" dirty="0"/>
           </a:p>
